--- a/Files/Data_Modelling_101/PPTs/Four-Step Dimensional Design Process_Data_Modelling_101.pptx
+++ b/Files/Data_Modelling_101/PPTs/Four-Step Dimensional Design Process_Data_Modelling_101.pptx
@@ -4851,7 +4851,7 @@
                 <a:cs typeface="Calibri"/>
                 <a:sym typeface="Calibri"/>
               </a:rPr>
-              <a:t>Senior Data Engineer</a:t>
+              <a:t>Data Engineering Consultant</a:t>
             </a:r>
             <a:endParaRPr sz="1050" b="1" i="0" u="none" strike="noStrike" cap="none" dirty="0">
               <a:solidFill>
